--- a/other/documents/QAPP/DRAFT Figure 5 Data Management Flowchart KWF.pptx
+++ b/other/documents/QAPP/DRAFT Figure 5 Data Management Flowchart KWF.pptx
@@ -244,7 +244,7 @@
           <a:p>
             <a:fld id="{9246DC00-BA13-4AF0-8D8A-FF497779F98C}" type="datetimeFigureOut">
               <a:rPr lang="en-US" smtClean="0"/>
-              <a:t>1/27/2023</a:t>
+              <a:t>2/9/2023</a:t>
             </a:fld>
             <a:endParaRPr lang="en-US"/>
           </a:p>
@@ -414,7 +414,7 @@
           <a:p>
             <a:fld id="{9246DC00-BA13-4AF0-8D8A-FF497779F98C}" type="datetimeFigureOut">
               <a:rPr lang="en-US" smtClean="0"/>
-              <a:t>1/27/2023</a:t>
+              <a:t>2/9/2023</a:t>
             </a:fld>
             <a:endParaRPr lang="en-US"/>
           </a:p>
@@ -594,7 +594,7 @@
           <a:p>
             <a:fld id="{9246DC00-BA13-4AF0-8D8A-FF497779F98C}" type="datetimeFigureOut">
               <a:rPr lang="en-US" smtClean="0"/>
-              <a:t>1/27/2023</a:t>
+              <a:t>2/9/2023</a:t>
             </a:fld>
             <a:endParaRPr lang="en-US"/>
           </a:p>
@@ -764,7 +764,7 @@
           <a:p>
             <a:fld id="{9246DC00-BA13-4AF0-8D8A-FF497779F98C}" type="datetimeFigureOut">
               <a:rPr lang="en-US" smtClean="0"/>
-              <a:t>1/27/2023</a:t>
+              <a:t>2/9/2023</a:t>
             </a:fld>
             <a:endParaRPr lang="en-US"/>
           </a:p>
@@ -1008,7 +1008,7 @@
           <a:p>
             <a:fld id="{9246DC00-BA13-4AF0-8D8A-FF497779F98C}" type="datetimeFigureOut">
               <a:rPr lang="en-US" smtClean="0"/>
-              <a:t>1/27/2023</a:t>
+              <a:t>2/9/2023</a:t>
             </a:fld>
             <a:endParaRPr lang="en-US"/>
           </a:p>
@@ -1240,7 +1240,7 @@
           <a:p>
             <a:fld id="{9246DC00-BA13-4AF0-8D8A-FF497779F98C}" type="datetimeFigureOut">
               <a:rPr lang="en-US" smtClean="0"/>
-              <a:t>1/27/2023</a:t>
+              <a:t>2/9/2023</a:t>
             </a:fld>
             <a:endParaRPr lang="en-US"/>
           </a:p>
@@ -1607,7 +1607,7 @@
           <a:p>
             <a:fld id="{9246DC00-BA13-4AF0-8D8A-FF497779F98C}" type="datetimeFigureOut">
               <a:rPr lang="en-US" smtClean="0"/>
-              <a:t>1/27/2023</a:t>
+              <a:t>2/9/2023</a:t>
             </a:fld>
             <a:endParaRPr lang="en-US"/>
           </a:p>
@@ -1725,7 +1725,7 @@
           <a:p>
             <a:fld id="{9246DC00-BA13-4AF0-8D8A-FF497779F98C}" type="datetimeFigureOut">
               <a:rPr lang="en-US" smtClean="0"/>
-              <a:t>1/27/2023</a:t>
+              <a:t>2/9/2023</a:t>
             </a:fld>
             <a:endParaRPr lang="en-US"/>
           </a:p>
@@ -1820,7 +1820,7 @@
           <a:p>
             <a:fld id="{9246DC00-BA13-4AF0-8D8A-FF497779F98C}" type="datetimeFigureOut">
               <a:rPr lang="en-US" smtClean="0"/>
-              <a:t>1/27/2023</a:t>
+              <a:t>2/9/2023</a:t>
             </a:fld>
             <a:endParaRPr lang="en-US"/>
           </a:p>
@@ -2097,7 +2097,7 @@
           <a:p>
             <a:fld id="{9246DC00-BA13-4AF0-8D8A-FF497779F98C}" type="datetimeFigureOut">
               <a:rPr lang="en-US" smtClean="0"/>
-              <a:t>1/27/2023</a:t>
+              <a:t>2/9/2023</a:t>
             </a:fld>
             <a:endParaRPr lang="en-US"/>
           </a:p>
@@ -2354,7 +2354,7 @@
           <a:p>
             <a:fld id="{9246DC00-BA13-4AF0-8D8A-FF497779F98C}" type="datetimeFigureOut">
               <a:rPr lang="en-US" smtClean="0"/>
-              <a:t>1/27/2023</a:t>
+              <a:t>2/9/2023</a:t>
             </a:fld>
             <a:endParaRPr lang="en-US"/>
           </a:p>
@@ -2567,7 +2567,7 @@
           <a:p>
             <a:fld id="{9246DC00-BA13-4AF0-8D8A-FF497779F98C}" type="datetimeFigureOut">
               <a:rPr lang="en-US" smtClean="0"/>
-              <a:t>1/27/2023</a:t>
+              <a:t>2/9/2023</a:t>
             </a:fld>
             <a:endParaRPr lang="en-US"/>
           </a:p>
@@ -3730,7 +3730,7 @@
         <p:spPr>
           <a:xfrm>
             <a:off x="2224086" y="5225840"/>
-            <a:ext cx="2921351" cy="523220"/>
+            <a:ext cx="3454523" cy="525693"/>
           </a:xfrm>
           <a:prstGeom prst="rect">
             <a:avLst/>
@@ -3765,7 +3765,19 @@
             </a:r>
             <a:r>
               <a:rPr lang="en-US" sz="1400" dirty="0" smtClean="0"/>
-              <a:t>GitHub/Posit)</a:t>
+              <a:t>GitHub/</a:t>
+            </a:r>
+            <a:r>
+              <a:rPr lang="en-US" sz="1400" dirty="0" err="1" smtClean="0"/>
+              <a:t>RStudio</a:t>
+            </a:r>
+            <a:r>
+              <a:rPr lang="en-US" sz="1400" dirty="0" smtClean="0"/>
+              <a:t>/Posit</a:t>
+            </a:r>
+            <a:r>
+              <a:rPr lang="en-US" sz="1400" dirty="0" smtClean="0"/>
+              <a:t>)</a:t>
             </a:r>
             <a:endParaRPr lang="en-US" sz="1400" dirty="0"/>
           </a:p>
@@ -4484,7 +4496,7 @@
         </p:nvCxnSpPr>
         <p:spPr>
           <a:xfrm>
-            <a:off x="320353" y="885429"/>
+            <a:off x="258361" y="885429"/>
             <a:ext cx="0" cy="7866704"/>
           </a:xfrm>
           <a:prstGeom prst="straightConnector1">
@@ -4578,7 +4590,7 @@
             <a:pPr algn="ctr"/>
             <a:r>
               <a:rPr lang="en-US" sz="1400" dirty="0" smtClean="0"/>
-              <a:t>ADEC (pulled via AQWMS)</a:t>
+              <a:t>EPA Water Quality Portal (WQP)</a:t>
             </a:r>
             <a:endParaRPr lang="en-US" sz="1400" dirty="0"/>
           </a:p>
